--- a/docs/training/scanner-training-full-es.pptx
+++ b/docs/training/scanner-training-full-es.pptx
@@ -140,26 +140,26 @@
   <p:extLst>
     <p:ext uri="{521415D9-36F7-43E2-AB2F-B90AF26B5E84}">
       <p14:sectionLst xmlns:p14="http://schemas.microsoft.com/office/powerpoint/2010/main">
-        <p14:section name="Inicio" id="{1a8b7333-0cb7-0eb7-48de-fa5fba4dc579}">
+        <p14:section name="Inicio" id="{266899f1-5953-bf9a-8fff-27d831fd8cba}">
           <p14:sldIdLst>
             <p14:sldId id="256"/>
           </p14:sldIdLst>
         </p14:section>
-        <p14:section name="Parte 1 · Antes de empezar" id="{f8f76691-a0f2-23f8-020a-bc4349cef3b2}">
+        <p14:section name="Parte 1 · Antes de empezar" id="{a7b22ecd-e75a-856b-97e4-ae0a213b734d}">
           <p14:sldIdLst>
             <p14:sldId id="257"/>
             <p14:sldId id="258"/>
             <p14:sldId id="259"/>
           </p14:sldIdLst>
         </p14:section>
-        <p14:section name="Parte 2 · Iniciar sesión" id="{412f4fe9-cd6c-95f3-6469-55c29a29f9a9}">
+        <p14:section name="Parte 2 · Iniciar sesión" id="{5f8c9935-d55f-ce6b-88f3-37917aac9dbd}">
           <p14:sldIdLst>
             <p14:sldId id="260"/>
             <p14:sldId id="261"/>
             <p14:sldId id="262"/>
           </p14:sldIdLst>
         </p14:section>
-        <p14:section name="Parte 3 · Contar una tarima" id="{d9a07d5e-549a-8845-5e2f-66ef8cffba0a}">
+        <p14:section name="Parte 3 · Contar una tarima" id="{fdfe2ed4-5012-93e7-1a3f-784d67f66837}">
           <p14:sldIdLst>
             <p14:sldId id="263"/>
             <p14:sldId id="264"/>
@@ -170,14 +170,14 @@
             <p14:sldId id="269"/>
           </p14:sldIdLst>
         </p14:section>
-        <p14:section name="Parte 4 · Cuando la ubicación es diferente" id="{ab6fb002-079b-31cc-aabe-e33a67147c9d}">
+        <p14:section name="Parte 4 · Cuando la ubicación es diferente" id="{e4d9dffc-b4cc-494c-d1d6-b8c23decbb65}">
           <p14:sldIdLst>
             <p14:sldId id="270"/>
             <p14:sldId id="271"/>
             <p14:sldId id="272"/>
           </p14:sldIdLst>
         </p14:section>
-        <p14:section name="Parte 5 · Etiquetas" id="{e4acf59c-03c7-5770-e1eb-8e1adcb9fcc3}">
+        <p14:section name="Parte 5 · Etiquetas" id="{f5c44245-d925-c3d8-7303-7343c187d80a}">
           <p14:sldIdLst>
             <p14:sldId id="273"/>
             <p14:sldId id="274"/>
@@ -186,7 +186,7 @@
             <p14:sldId id="277"/>
           </p14:sldIdLst>
         </p14:section>
-        <p14:section name="Parte 6 · Ayuda y correcciones" id="{df8c8333-78f6-fa57-329e-f9abb31ff608}">
+        <p14:section name="Parte 6 · Ayuda y correcciones" id="{9c66f285-58af-3c17-47a1-b53fac0464a4}">
           <p14:sldIdLst>
             <p14:sldId id="278"/>
             <p14:sldId id="279"/>
@@ -196,14 +196,14 @@
             <p14:sldId id="283"/>
           </p14:sldIdLst>
         </p14:section>
-        <p14:section name="Parte 7 · Segundos conteos, y terminar" id="{f746af9c-d054-f02c-7650-ee7265a09a27}">
+        <p14:section name="Parte 7 · Segundos conteos, y terminar" id="{0444f9b5-9f3b-9607-8af3-b7d49d9e9b48}">
           <p14:sldIdLst>
             <p14:sldId id="284"/>
             <p14:sldId id="285"/>
             <p14:sldId id="286"/>
           </p14:sldIdLst>
         </p14:section>
-        <p14:section name="Las reglas" id="{b9ee12b3-b810-4769-444c-4615ab9d5a19}">
+        <p14:section name="Las reglas" id="{d53df5dd-0f01-6ea2-7a13-5dd93fdb1dc6}">
           <p14:sldIdLst>
             <p14:sldId id="287"/>
             <p14:sldId id="288"/>
@@ -4652,7 +4652,7 @@
       </p:sp>
       <p:pic>
         <p:nvPicPr>
-          <p:cNvPr id="4" name="screen rack-scanned" descr="/home/user/physical-inv-app/docs/training/shots/es/06-rack-scanned.png">    </p:cNvPr>
+          <p:cNvPr id="4" name="screen rack-scanned" descr="/home/user/physical-inv-app/docs/training/shots/full/es/06-rack-scanned.png">    </p:cNvPr>
           <p:cNvPicPr>
             <a:picLocks noChangeAspect="1"/>
           </p:cNvPicPr>
@@ -4734,7 +4734,7 @@
       </p:sp>
       <p:pic>
         <p:nvPicPr>
-          <p:cNvPr id="6" name="label-rack" descr="/home/user/physical-inv-app/docs/training/shots/es/label-rack.png">    </p:cNvPr>
+          <p:cNvPr id="6" name="label-rack" descr="/home/user/physical-inv-app/docs/training/shots/full/es/label-rack.png">    </p:cNvPr>
           <p:cNvPicPr>
             <a:picLocks noChangeAspect="1"/>
           </p:cNvPicPr>
@@ -4904,7 +4904,7 @@
       </p:sp>
       <p:pic>
         <p:nvPicPr>
-          <p:cNvPr id="4" name="screen pallet-scanned" descr="/home/user/physical-inv-app/docs/training/shots/es/07-pallet-scanned.png">    </p:cNvPr>
+          <p:cNvPr id="4" name="screen pallet-scanned" descr="/home/user/physical-inv-app/docs/training/shots/full/es/07-pallet-scanned.png">    </p:cNvPr>
           <p:cNvPicPr>
             <a:picLocks noChangeAspect="1"/>
           </p:cNvPicPr>
@@ -5016,7 +5016,7 @@
       </p:sp>
       <p:pic>
         <p:nvPicPr>
-          <p:cNvPr id="6" name="label-pallet" descr="/home/user/physical-inv-app/docs/training/shots/es/label-pallet.png">    </p:cNvPr>
+          <p:cNvPr id="6" name="label-pallet" descr="/home/user/physical-inv-app/docs/training/shots/full/es/label-pallet.png">    </p:cNvPr>
           <p:cNvPicPr>
             <a:picLocks noChangeAspect="1"/>
           </p:cNvPicPr>
@@ -5249,7 +5249,7 @@
       </p:sp>
       <p:pic>
         <p:nvPicPr>
-          <p:cNvPr id="4" name="screen quantity" descr="/home/user/physical-inv-app/docs/training/shots/es/08-quantity.png">    </p:cNvPr>
+          <p:cNvPr id="4" name="screen quantity" descr="/home/user/physical-inv-app/docs/training/shots/full/es/08-quantity.png">    </p:cNvPr>
           <p:cNvPicPr>
             <a:picLocks noChangeAspect="1"/>
           </p:cNvPicPr>
@@ -5540,7 +5540,7 @@
       </p:sp>
       <p:pic>
         <p:nvPicPr>
-          <p:cNvPr id="4" name="screen comments" descr="/home/user/physical-inv-app/docs/training/shots/es/09-comments.png">    </p:cNvPr>
+          <p:cNvPr id="4" name="screen comments" descr="/home/user/physical-inv-app/docs/training/shots/full/es/09-comments.png">    </p:cNvPr>
           <p:cNvPicPr>
             <a:picLocks noChangeAspect="1"/>
           </p:cNvPicPr>
@@ -5879,7 +5879,7 @@
       </p:sp>
       <p:pic>
         <p:nvPicPr>
-          <p:cNvPr id="4" name="screen wrong-label" descr="/home/user/physical-inv-app/docs/training/shots/es/10-wrong-label.png">    </p:cNvPr>
+          <p:cNvPr id="4" name="screen wrong-label" descr="/home/user/physical-inv-app/docs/training/shots/full/es/10-wrong-label.png">    </p:cNvPr>
           <p:cNvPicPr>
             <a:picLocks noChangeAspect="1"/>
           </p:cNvPicPr>
@@ -6246,7 +6246,7 @@
       </p:sp>
       <p:pic>
         <p:nvPicPr>
-          <p:cNvPr id="4" name="screen still-in-bin" descr="/home/user/physical-inv-app/docs/training/shots/es/11-still-in-bin.png">    </p:cNvPr>
+          <p:cNvPr id="4" name="screen still-in-bin" descr="/home/user/physical-inv-app/docs/training/shots/full/es/11-still-in-bin.png">    </p:cNvPr>
           <p:cNvPicPr>
             <a:picLocks noChangeAspect="1"/>
           </p:cNvPicPr>
@@ -6615,7 +6615,7 @@
       </p:sp>
       <p:pic>
         <p:nvPicPr>
-          <p:cNvPr id="4" name="screen empty-button" descr="/home/user/physical-inv-app/docs/training/shots/es/12-empty-button.png">    </p:cNvPr>
+          <p:cNvPr id="4" name="screen empty-button" descr="/home/user/physical-inv-app/docs/training/shots/full/es/12-empty-button.png">    </p:cNvPr>
           <p:cNvPicPr>
             <a:picLocks noChangeAspect="1"/>
           </p:cNvPicPr>
@@ -6775,7 +6775,7 @@
       </p:sp>
       <p:pic>
         <p:nvPicPr>
-          <p:cNvPr id="6" name="label-rack" descr="/home/user/physical-inv-app/docs/training/shots/es/label-rack.png">    </p:cNvPr>
+          <p:cNvPr id="6" name="label-rack" descr="/home/user/physical-inv-app/docs/training/shots/full/es/label-rack.png">    </p:cNvPr>
           <p:cNvPicPr>
             <a:picLocks noChangeAspect="1"/>
           </p:cNvPicPr>
@@ -7084,7 +7084,7 @@
       </p:sp>
       <p:pic>
         <p:nvPicPr>
-          <p:cNvPr id="4" name="screen multi-label-button" descr="/home/user/physical-inv-app/docs/training/shots/es/13-multi-label-button.png">    </p:cNvPr>
+          <p:cNvPr id="4" name="screen multi-label-button" descr="/home/user/physical-inv-app/docs/training/shots/full/es/13-multi-label-button.png">    </p:cNvPr>
           <p:cNvPicPr>
             <a:picLocks noChangeAspect="1"/>
           </p:cNvPicPr>
@@ -7108,7 +7108,7 @@
       </p:pic>
       <p:pic>
         <p:nvPicPr>
-          <p:cNvPr id="5" name="screen multi-label-2" descr="/home/user/physical-inv-app/docs/training/shots/es/14-multi-label-2.png">    </p:cNvPr>
+          <p:cNvPr id="5" name="screen multi-label-2" descr="/home/user/physical-inv-app/docs/training/shots/full/es/14-multi-label-2.png">    </p:cNvPr>
           <p:cNvPicPr>
             <a:picLocks noChangeAspect="1"/>
           </p:cNvPicPr>
@@ -7132,7 +7132,7 @@
       </p:pic>
       <p:pic>
         <p:nvPicPr>
-          <p:cNvPr id="6" name="screen multi-label-done" descr="/home/user/physical-inv-app/docs/training/shots/es/15-multi-label-done.png">    </p:cNvPr>
+          <p:cNvPr id="6" name="screen multi-label-done" descr="/home/user/physical-inv-app/docs/training/shots/full/es/15-multi-label-done.png">    </p:cNvPr>
           <p:cNvPicPr>
             <a:picLocks noChangeAspect="1"/>
           </p:cNvPicPr>
@@ -7522,7 +7522,7 @@
       </p:sp>
       <p:pic>
         <p:nvPicPr>
-          <p:cNvPr id="4" name="screen same-label-button" descr="/home/user/physical-inv-app/docs/training/shots/es/16-same-label-button.png">    </p:cNvPr>
+          <p:cNvPr id="4" name="screen same-label-button" descr="/home/user/physical-inv-app/docs/training/shots/full/es/16-same-label-button.png">    </p:cNvPr>
           <p:cNvPicPr>
             <a:picLocks noChangeAspect="1"/>
           </p:cNvPicPr>
@@ -7828,7 +7828,7 @@
       </p:sp>
       <p:pic>
         <p:nvPicPr>
-          <p:cNvPr id="4" name="screen no-scan" descr="/home/user/physical-inv-app/docs/training/shots/es/17-no-scan.png">    </p:cNvPr>
+          <p:cNvPr id="4" name="screen no-scan" descr="/home/user/physical-inv-app/docs/training/shots/full/es/17-no-scan.png">    </p:cNvPr>
           <p:cNvPicPr>
             <a:picLocks noChangeAspect="1"/>
           </p:cNvPicPr>
@@ -8212,7 +8212,7 @@
       </p:sp>
       <p:pic>
         <p:nvPicPr>
-          <p:cNvPr id="4" name="screen not-on-list" descr="/home/user/physical-inv-app/docs/training/shots/es/18-not-on-list.png">    </p:cNvPr>
+          <p:cNvPr id="4" name="screen not-on-list" descr="/home/user/physical-inv-app/docs/training/shots/full/es/18-not-on-list.png">    </p:cNvPr>
           <p:cNvPicPr>
             <a:picLocks noChangeAspect="1"/>
           </p:cNvPicPr>
@@ -8795,7 +8795,7 @@
       </p:sp>
       <p:pic>
         <p:nvPicPr>
-          <p:cNvPr id="4" name="screen history" descr="/home/user/physical-inv-app/docs/training/shots/es/19-history.png">    </p:cNvPr>
+          <p:cNvPr id="4" name="screen history" descr="/home/user/physical-inv-app/docs/training/shots/full/es/19-history.png">    </p:cNvPr>
           <p:cNvPicPr>
             <a:picLocks noChangeAspect="1"/>
           </p:cNvPicPr>
@@ -9113,7 +9113,7 @@
       </p:sp>
       <p:pic>
         <p:nvPicPr>
-          <p:cNvPr id="4" name="screen message" descr="/home/user/physical-inv-app/docs/training/shots/es/20-message.png">    </p:cNvPr>
+          <p:cNvPr id="4" name="screen message" descr="/home/user/physical-inv-app/docs/training/shots/full/es/20-message.png">    </p:cNvPr>
           <p:cNvPicPr>
             <a:picLocks noChangeAspect="1"/>
           </p:cNvPicPr>
@@ -9371,7 +9371,7 @@
       </p:sp>
       <p:pic>
         <p:nvPicPr>
-          <p:cNvPr id="4" name="screen offline" descr="/home/user/physical-inv-app/docs/training/shots/es/21-offline.png">    </p:cNvPr>
+          <p:cNvPr id="4" name="screen offline" descr="/home/user/physical-inv-app/docs/training/shots/full/es/21-offline.png">    </p:cNvPr>
           <p:cNvPicPr>
             <a:picLocks noChangeAspect="1"/>
           </p:cNvPicPr>
@@ -9725,7 +9725,7 @@
       </p:sp>
       <p:pic>
         <p:nvPicPr>
-          <p:cNvPr id="4" name="screen report-problem" descr="/home/user/physical-inv-app/docs/training/shots/es/22-report-problem.png">    </p:cNvPr>
+          <p:cNvPr id="4" name="screen report-problem" descr="/home/user/physical-inv-app/docs/training/shots/full/es/22-report-problem.png">    </p:cNvPr>
           <p:cNvPicPr>
             <a:picLocks noChangeAspect="1"/>
           </p:cNvPicPr>
@@ -10031,7 +10031,7 @@
       </p:sp>
       <p:pic>
         <p:nvPicPr>
-          <p:cNvPr id="4" name="screen sos-list" descr="/home/user/physical-inv-app/docs/training/shots/es/23-sos-list.png">    </p:cNvPr>
+          <p:cNvPr id="4" name="screen sos-list" descr="/home/user/physical-inv-app/docs/training/shots/full/es/23-sos-list.png">    </p:cNvPr>
           <p:cNvPicPr>
             <a:picLocks noChangeAspect="1"/>
           </p:cNvPicPr>
@@ -10055,7 +10055,7 @@
       </p:pic>
       <p:pic>
         <p:nvPicPr>
-          <p:cNvPr id="5" name="screen sos-seen" descr="/home/user/physical-inv-app/docs/training/shots/es/24-sos-seen.png">    </p:cNvPr>
+          <p:cNvPr id="5" name="screen sos-seen" descr="/home/user/physical-inv-app/docs/training/shots/full/es/24-sos-seen.png">    </p:cNvPr>
           <p:cNvPicPr>
             <a:picLocks noChangeAspect="1"/>
           </p:cNvPicPr>
@@ -10533,7 +10533,7 @@
       </p:sp>
       <p:pic>
         <p:nvPicPr>
-          <p:cNvPr id="4" name="screen signon" descr="/home/user/physical-inv-app/docs/training/shots/es/01-signon.png">    </p:cNvPr>
+          <p:cNvPr id="4" name="screen signon" descr="/home/user/physical-inv-app/docs/training/shots/full/es/01-signon.png">    </p:cNvPr>
           <p:cNvPicPr>
             <a:picLocks noChangeAspect="1"/>
           </p:cNvPicPr>
@@ -10887,7 +10887,7 @@
       </p:sp>
       <p:pic>
         <p:nvPicPr>
-          <p:cNvPr id="4" name="screen second-counts-offered" descr="/home/user/physical-inv-app/docs/training/shots/es/25-second-counts-offered.png">    </p:cNvPr>
+          <p:cNvPr id="4" name="screen second-counts-offered" descr="/home/user/physical-inv-app/docs/training/shots/full/es/25-second-counts-offered.png">    </p:cNvPr>
           <p:cNvPicPr>
             <a:picLocks noChangeAspect="1"/>
           </p:cNvPicPr>
@@ -10911,7 +10911,7 @@
       </p:pic>
       <p:pic>
         <p:nvPicPr>
-          <p:cNvPr id="5" name="screen second-count" descr="/home/user/physical-inv-app/docs/training/shots/es/26-second-count.png">    </p:cNvPr>
+          <p:cNvPr id="5" name="screen second-count" descr="/home/user/physical-inv-app/docs/training/shots/full/es/26-second-count.png">    </p:cNvPr>
           <p:cNvPicPr>
             <a:picLocks noChangeAspect="1"/>
           </p:cNvPicPr>
@@ -11310,7 +11310,7 @@
       </p:sp>
       <p:pic>
         <p:nvPicPr>
-          <p:cNvPr id="4" name="screen aisle-complete" descr="/home/user/physical-inv-app/docs/training/shots/es/27-aisle-complete.png">    </p:cNvPr>
+          <p:cNvPr id="4" name="screen aisle-complete" descr="/home/user/physical-inv-app/docs/training/shots/full/es/27-aisle-complete.png">    </p:cNvPr>
           <p:cNvPicPr>
             <a:picLocks noChangeAspect="1"/>
           </p:cNvPicPr>
@@ -11334,7 +11334,7 @@
       </p:pic>
       <p:pic>
         <p:nvPicPr>
-          <p:cNvPr id="5" name="screen next-aisle" descr="/home/user/physical-inv-app/docs/training/shots/es/28-next-aisle.png">    </p:cNvPr>
+          <p:cNvPr id="5" name="screen next-aisle" descr="/home/user/physical-inv-app/docs/training/shots/full/es/28-next-aisle.png">    </p:cNvPr>
           <p:cNvPicPr>
             <a:picLocks noChangeAspect="1"/>
           </p:cNvPicPr>
@@ -11652,7 +11652,7 @@
       </p:sp>
       <p:pic>
         <p:nvPicPr>
-          <p:cNvPr id="4" name="screen next-bin" descr="/home/user/physical-inv-app/docs/training/shots/es/05-next-bin.png">    </p:cNvPr>
+          <p:cNvPr id="4" name="screen next-bin" descr="/home/user/physical-inv-app/docs/training/shots/full/es/05-next-bin.png">    </p:cNvPr>
           <p:cNvPicPr>
             <a:picLocks noChangeAspect="1"/>
           </p:cNvPicPr>
@@ -13970,7 +13970,7 @@
       </p:sp>
       <p:pic>
         <p:nvPicPr>
-          <p:cNvPr id="4" name="screen signon-es" descr="/home/user/physical-inv-app/docs/training/shots/es/02-signon-es.png">    </p:cNvPr>
+          <p:cNvPr id="4" name="screen signon-es" descr="/home/user/physical-inv-app/docs/training/shots/full/es/02-signon-es.png">    </p:cNvPr>
           <p:cNvPicPr>
             <a:picLocks noChangeAspect="1"/>
           </p:cNvPicPr>
@@ -14385,7 +14385,7 @@
       </p:sp>
       <p:pic>
         <p:nvPicPr>
-          <p:cNvPr id="4" name="screen signon-filled" descr="/home/user/physical-inv-app/docs/training/shots/es/03-signon-filled.png">    </p:cNvPr>
+          <p:cNvPr id="4" name="screen signon-filled" descr="/home/user/physical-inv-app/docs/training/shots/full/es/03-signon-filled.png">    </p:cNvPr>
           <p:cNvPicPr>
             <a:picLocks noChangeAspect="1"/>
           </p:cNvPicPr>
@@ -14620,7 +14620,7 @@
       </p:sp>
       <p:pic>
         <p:nvPicPr>
-          <p:cNvPr id="6" name="label-team" descr="/home/user/physical-inv-app/docs/training/shots/es/label-team.png">    </p:cNvPr>
+          <p:cNvPr id="6" name="label-team" descr="/home/user/physical-inv-app/docs/training/shots/full/es/label-team.png">    </p:cNvPr>
           <p:cNvPicPr>
             <a:picLocks noChangeAspect="1"/>
           </p:cNvPicPr>
@@ -14644,7 +14644,7 @@
       </p:pic>
       <p:pic>
         <p:nvPicPr>
-          <p:cNvPr id="7" name="label-badge" descr="/home/user/physical-inv-app/docs/training/shots/es/label-badge.png">    </p:cNvPr>
+          <p:cNvPr id="7" name="label-badge" descr="/home/user/physical-inv-app/docs/training/shots/full/es/label-badge.png">    </p:cNvPr>
           <p:cNvPicPr>
             <a:picLocks noChangeAspect="1"/>
           </p:cNvPicPr>
@@ -14814,7 +14814,7 @@
       </p:sp>
       <p:pic>
         <p:nvPicPr>
-          <p:cNvPr id="4" name="screen your-aisle" descr="/home/user/physical-inv-app/docs/training/shots/es/04-your-aisle.png">    </p:cNvPr>
+          <p:cNvPr id="4" name="screen your-aisle" descr="/home/user/physical-inv-app/docs/training/shots/full/es/04-your-aisle.png">    </p:cNvPr>
           <p:cNvPicPr>
             <a:picLocks noChangeAspect="1"/>
           </p:cNvPicPr>
@@ -15292,7 +15292,7 @@
       </p:sp>
       <p:pic>
         <p:nvPicPr>
-          <p:cNvPr id="4" name="screen next-bin" descr="/home/user/physical-inv-app/docs/training/shots/es/05-next-bin.png">    </p:cNvPr>
+          <p:cNvPr id="4" name="screen next-bin" descr="/home/user/physical-inv-app/docs/training/shots/full/es/05-next-bin.png">    </p:cNvPr>
           <p:cNvPicPr>
             <a:picLocks noChangeAspect="1"/>
           </p:cNvPicPr>

--- a/docs/training/scanner-training-full-es.pptx
+++ b/docs/training/scanner-training-full-es.pptx
@@ -140,26 +140,26 @@
   <p:extLst>
     <p:ext uri="{521415D9-36F7-43E2-AB2F-B90AF26B5E84}">
       <p14:sectionLst xmlns:p14="http://schemas.microsoft.com/office/powerpoint/2010/main">
-        <p14:section name="Inicio" id="{266899f1-5953-bf9a-8fff-27d831fd8cba}">
+        <p14:section name="Inicio" id="{b5fbd221-38c5-ce09-c8b7-39bc8bb4828e}">
           <p14:sldIdLst>
             <p14:sldId id="256"/>
           </p14:sldIdLst>
         </p14:section>
-        <p14:section name="Parte 1 · Antes de empezar" id="{a7b22ecd-e75a-856b-97e4-ae0a213b734d}">
+        <p14:section name="Parte 1 · Antes de empezar" id="{39cae9c2-0936-2c7a-1a19-ca55eaf6ea7d}">
           <p14:sldIdLst>
             <p14:sldId id="257"/>
             <p14:sldId id="258"/>
             <p14:sldId id="259"/>
           </p14:sldIdLst>
         </p14:section>
-        <p14:section name="Parte 2 · Iniciar sesión" id="{5f8c9935-d55f-ce6b-88f3-37917aac9dbd}">
+        <p14:section name="Parte 2 · Iniciar sesión" id="{f304d6ee-6967-5a3a-ff67-ce337fdf5687}">
           <p14:sldIdLst>
             <p14:sldId id="260"/>
             <p14:sldId id="261"/>
             <p14:sldId id="262"/>
           </p14:sldIdLst>
         </p14:section>
-        <p14:section name="Parte 3 · Contar una tarima" id="{fdfe2ed4-5012-93e7-1a3f-784d67f66837}">
+        <p14:section name="Parte 3 · Contar una tarima" id="{101d802e-5717-1aab-0a60-b7358730e718}">
           <p14:sldIdLst>
             <p14:sldId id="263"/>
             <p14:sldId id="264"/>
@@ -170,14 +170,14 @@
             <p14:sldId id="269"/>
           </p14:sldIdLst>
         </p14:section>
-        <p14:section name="Parte 4 · Cuando la ubicación es diferente" id="{e4d9dffc-b4cc-494c-d1d6-b8c23decbb65}">
+        <p14:section name="Parte 4 · Cuando la ubicación es diferente" id="{e096a630-1399-474c-1958-5886a81ac74c}">
           <p14:sldIdLst>
             <p14:sldId id="270"/>
             <p14:sldId id="271"/>
             <p14:sldId id="272"/>
           </p14:sldIdLst>
         </p14:section>
-        <p14:section name="Parte 5 · Etiquetas" id="{f5c44245-d925-c3d8-7303-7343c187d80a}">
+        <p14:section name="Parte 5 · Etiquetas" id="{1104f5db-36f6-472c-f354-35879ebf9f48}">
           <p14:sldIdLst>
             <p14:sldId id="273"/>
             <p14:sldId id="274"/>
@@ -186,7 +186,7 @@
             <p14:sldId id="277"/>
           </p14:sldIdLst>
         </p14:section>
-        <p14:section name="Parte 6 · Ayuda y correcciones" id="{9c66f285-58af-3c17-47a1-b53fac0464a4}">
+        <p14:section name="Parte 6 · Ayuda y correcciones" id="{de161706-45c6-7337-0490-7e553d4c1a1b}">
           <p14:sldIdLst>
             <p14:sldId id="278"/>
             <p14:sldId id="279"/>
@@ -196,14 +196,14 @@
             <p14:sldId id="283"/>
           </p14:sldIdLst>
         </p14:section>
-        <p14:section name="Parte 7 · Segundos conteos, y terminar" id="{0444f9b5-9f3b-9607-8af3-b7d49d9e9b48}">
+        <p14:section name="Parte 7 · Segundos conteos, y terminar" id="{3fdda3d9-3825-ccd1-9b60-6638b2efae52}">
           <p14:sldIdLst>
             <p14:sldId id="284"/>
             <p14:sldId id="285"/>
             <p14:sldId id="286"/>
           </p14:sldIdLst>
         </p14:section>
-        <p14:section name="Las reglas" id="{d53df5dd-0f01-6ea2-7a13-5dd93fdb1dc6}">
+        <p14:section name="Las reglas" id="{6012f6c3-ca9d-01b1-baf3-bf656724f83b}">
           <p14:sldIdLst>
             <p14:sldId id="287"/>
             <p14:sldId id="288"/>
@@ -11390,7 +11390,7 @@
                   <a:schemeClr val="bg2"/>
                 </a:solidFill>
               </a:rPr>
-              <a:t>Solo cuando cada lugar de tus niveles está contado: abre </a:t>
+              <a:t>Cuando cada lugar de tus niveles está contado, </a:t>
             </a:r>
             <a:pPr algn="l" marL="228600" indent="-228600">
               <a:spcAft>
@@ -11405,7 +11405,7 @@
                   <a:schemeClr val="bg2"/>
                 </a:solidFill>
               </a:rPr>
-              <a:t>Mi pasillo</a:t>
+              <a:t>avisa a tu supervisor</a:t>
             </a:r>
             <a:pPr algn="l" marL="228600" indent="-228600">
               <a:spcAft>
@@ -11420,7 +11420,7 @@
                   <a:schemeClr val="bg2"/>
                 </a:solidFill>
               </a:rPr>
-              <a:t> y toca </a:t>
+              <a:t>. Él marca el pasillo terminado en la oficina — sin botón en el escáner — y tu siguiente pasillo aparece en </a:t>
             </a:r>
             <a:pPr algn="l" marL="228600" indent="-228600">
               <a:spcAft>
@@ -11435,7 +11435,7 @@
                   <a:schemeClr val="bg2"/>
                 </a:solidFill>
               </a:rPr>
-              <a:t>Pasillo terminado — siguiente pasillo</a:t>
+              <a:t>Mi pasillo</a:t>
             </a:r>
             <a:pPr algn="l" marL="228600" indent="-228600">
               <a:spcAft>
@@ -11450,7 +11450,7 @@
                   <a:schemeClr val="bg2"/>
                 </a:solidFill>
               </a:rPr>
-              <a:t>. El escáner te da el siguiente.</a:t>
+              <a:t> solo.</a:t>
             </a:r>
             <a:endParaRPr lang="en-US" sz="2200" dirty="0"/>
           </a:p>
@@ -13269,7 +13269,7 @@
                           <a:ea typeface="+mn-lt" pitchFamily="34" charset="-122"/>
                           <a:cs typeface="+mn-lt" pitchFamily="34" charset="-120"/>
                         </a:rPr>
-                        <a:t>Pasillo terminado — siguiente pasillo</a:t>
+                        <a:t>Actualizar, en Mi pasillo</a:t>
                       </a:r>
                       <a:endParaRPr lang="en-US" sz="1400" dirty="0">
                         <a:latin typeface="+mn-lt" charset="0"/>
@@ -13337,7 +13337,7 @@
                           <a:ea typeface="+mn-lt" pitchFamily="34" charset="-122"/>
                           <a:cs typeface="+mn-lt" pitchFamily="34" charset="-120"/>
                         </a:rPr>
-                        <a:t>Solo cuando todo el pasillo está contado</a:t>
+                        <a:t>Tu siguiente pasillo, cuando el supervisor marque este terminado</a:t>
                       </a:r>
                       <a:endParaRPr lang="en-US" sz="1400" dirty="0">
                         <a:latin typeface="+mn-lt" charset="0"/>

--- a/docs/training/scanner-training-full-es.pptx
+++ b/docs/training/scanner-training-full-es.pptx
@@ -143,27 +143,27 @@
   <p:extLst>
     <p:ext uri="{521415D9-36F7-43E2-AB2F-B90AF26B5E84}">
       <p14:sectionLst xmlns:p14="http://schemas.microsoft.com/office/powerpoint/2010/main">
-        <p14:section name="Inicio" id="{2b55b0a7-f168-25ea-bb57-f284d7e1f57b}">
+        <p14:section name="Inicio" id="{1a9ab9b0-5234-1c6f-237e-c48e475aebf2}">
           <p14:sldIdLst>
             <p14:sldId id="256"/>
             <p14:sldId id="257"/>
           </p14:sldIdLst>
         </p14:section>
-        <p14:section name="Parte 1 · Antes de empezar" id="{b30defb6-0b8c-2fb6-ac47-a36c251e84e4}">
+        <p14:section name="Parte 1 · Antes de empezar" id="{a7cf202a-58d4-8e9b-00b5-e536ac5f9508}">
           <p14:sldIdLst>
             <p14:sldId id="258"/>
             <p14:sldId id="259"/>
             <p14:sldId id="260"/>
           </p14:sldIdLst>
         </p14:section>
-        <p14:section name="Parte 2 · Iniciar sesión" id="{b6347889-fab0-be31-c3ad-4f218bfbb577}">
+        <p14:section name="Parte 2 · Iniciar sesión" id="{3e1082cb-938b-0139-6982-39cda389e09c}">
           <p14:sldIdLst>
             <p14:sldId id="261"/>
             <p14:sldId id="262"/>
             <p14:sldId id="263"/>
           </p14:sldIdLst>
         </p14:section>
-        <p14:section name="Parte 3 · Contar una tarima" id="{6ca4a3cd-7eca-85e3-7c19-8d6181d2ead4}">
+        <p14:section name="Parte 3 · Contar una tarima" id="{447ab94e-6aa0-5ff9-d153-20d140f1459d}">
           <p14:sldIdLst>
             <p14:sldId id="264"/>
             <p14:sldId id="265"/>
@@ -174,14 +174,14 @@
             <p14:sldId id="270"/>
           </p14:sldIdLst>
         </p14:section>
-        <p14:section name="Parte 4 · Cuando la ubicación es diferente" id="{e0e8bad0-c01d-d488-0d52-c98a772b6673}">
+        <p14:section name="Parte 4 · Cuando la ubicación es diferente" id="{f453acc4-cc49-ac20-50c9-6791a94df7f2}">
           <p14:sldIdLst>
             <p14:sldId id="271"/>
             <p14:sldId id="272"/>
             <p14:sldId id="273"/>
           </p14:sldIdLst>
         </p14:section>
-        <p14:section name="Parte 5 · Etiquetas" id="{ab91bef0-1cb0-481f-0d1d-89dc6511917a}">
+        <p14:section name="Parte 5 · Etiquetas" id="{99e779f9-a9d0-e021-01ff-f561a0ee89f5}">
           <p14:sldIdLst>
             <p14:sldId id="274"/>
             <p14:sldId id="275"/>
@@ -190,7 +190,7 @@
             <p14:sldId id="278"/>
           </p14:sldIdLst>
         </p14:section>
-        <p14:section name="Parte 6 · Ayuda y correcciones" id="{2f45711d-9ccf-0a73-2786-a3547d95ddb2}">
+        <p14:section name="Parte 6 · Ayuda y correcciones" id="{fc63fcb1-c506-73e3-5696-c31181c449ba}">
           <p14:sldIdLst>
             <p14:sldId id="279"/>
             <p14:sldId id="280"/>
@@ -200,14 +200,14 @@
             <p14:sldId id="284"/>
           </p14:sldIdLst>
         </p14:section>
-        <p14:section name="Parte 7 · Segundos conteos, y terminar" id="{d16a0435-6b84-6fdb-a5a1-16d79826b80a}">
+        <p14:section name="Parte 7 · Segundos conteos, y terminar" id="{26e6db93-2710-5d7c-16f6-bbed3d9dc486}">
           <p14:sldIdLst>
             <p14:sldId id="285"/>
             <p14:sldId id="286"/>
             <p14:sldId id="287"/>
           </p14:sldIdLst>
         </p14:section>
-        <p14:section name="Las reglas" id="{a8d6534e-80a2-4066-47f7-5fa4e348d49c}">
+        <p14:section name="Las reglas" id="{2ca02c92-3868-82d6-dce1-e16abdab540a}">
           <p14:sldIdLst>
             <p14:sldId id="288"/>
             <p14:sldId id="289"/>
@@ -10364,7 +10364,7 @@
                   <a:schemeClr val="bg2"/>
                 </a:solidFill>
               </a:rPr>
-              <a:t> — tus últimas 50 líneas. </a:t>
+              <a:t> — las líneas de tu equipo en las últimas 20 ubicaciones. </a:t>
             </a:r>
             <a:pPr algn="l" marL="228600" indent="-228600">
               <a:spcAft>
@@ -10394,7 +10394,7 @@
                   <a:schemeClr val="bg2"/>
                 </a:solidFill>
               </a:rPr>
-              <a:t> quita una mal hecha.</a:t>
+              <a:t> quita una mal hecha y te regresa a esa ubicación.</a:t>
             </a:r>
             <a:endParaRPr lang="en-US" sz="2200" dirty="0"/>
           </a:p>
